--- a/GandG_YPS/Presentation/ARB_draft_27Feb.pptx
+++ b/GandG_YPS/Presentation/ARB_draft_27Feb.pptx
@@ -13,8 +13,10 @@
     <p:sldId id="257" r:id="rId7"/>
     <p:sldId id="264" r:id="rId8"/>
     <p:sldId id="258" r:id="rId9"/>
-    <p:sldId id="263" r:id="rId10"/>
-    <p:sldId id="266" r:id="rId11"/>
+    <p:sldId id="267" r:id="rId10"/>
+    <p:sldId id="268" r:id="rId11"/>
+    <p:sldId id="263" r:id="rId12"/>
+    <p:sldId id="266" r:id="rId13"/>
   </p:sldIdLst>
   <p:sldSz cx="9144000" cy="6858000" type="screen4x3"/>
   <p:notesSz cx="6858000" cy="9144000"/>
@@ -311,7 +313,7 @@
           <a:p>
             <a:fld id="{5BCAD085-E8A6-8845-BD4E-CB4CCA059FC4}" type="datetimeFigureOut">
               <a:rPr lang="en-US" smtClean="0"/>
-              <a:t>3/3/2026</a:t>
+              <a:t>3/5/2026</a:t>
             </a:fld>
             <a:endParaRPr lang="en-US"/>
           </a:p>
@@ -479,7 +481,7 @@
           <a:p>
             <a:fld id="{5BCAD085-E8A6-8845-BD4E-CB4CCA059FC4}" type="datetimeFigureOut">
               <a:rPr lang="en-US" smtClean="0"/>
-              <a:t>3/3/2026</a:t>
+              <a:t>3/5/2026</a:t>
             </a:fld>
             <a:endParaRPr lang="en-US"/>
           </a:p>
@@ -657,7 +659,7 @@
           <a:p>
             <a:fld id="{5BCAD085-E8A6-8845-BD4E-CB4CCA059FC4}" type="datetimeFigureOut">
               <a:rPr lang="en-US" smtClean="0"/>
-              <a:t>3/3/2026</a:t>
+              <a:t>3/5/2026</a:t>
             </a:fld>
             <a:endParaRPr lang="en-US"/>
           </a:p>
@@ -825,7 +827,7 @@
           <a:p>
             <a:fld id="{5BCAD085-E8A6-8845-BD4E-CB4CCA059FC4}" type="datetimeFigureOut">
               <a:rPr lang="en-US" smtClean="0"/>
-              <a:t>3/3/2026</a:t>
+              <a:t>3/5/2026</a:t>
             </a:fld>
             <a:endParaRPr lang="en-US"/>
           </a:p>
@@ -1070,7 +1072,7 @@
           <a:p>
             <a:fld id="{5BCAD085-E8A6-8845-BD4E-CB4CCA059FC4}" type="datetimeFigureOut">
               <a:rPr lang="en-US" smtClean="0"/>
-              <a:t>3/3/2026</a:t>
+              <a:t>3/5/2026</a:t>
             </a:fld>
             <a:endParaRPr lang="en-US"/>
           </a:p>
@@ -1355,7 +1357,7 @@
           <a:p>
             <a:fld id="{5BCAD085-E8A6-8845-BD4E-CB4CCA059FC4}" type="datetimeFigureOut">
               <a:rPr lang="en-US" smtClean="0"/>
-              <a:t>3/3/2026</a:t>
+              <a:t>3/5/2026</a:t>
             </a:fld>
             <a:endParaRPr lang="en-US"/>
           </a:p>
@@ -1774,7 +1776,7 @@
           <a:p>
             <a:fld id="{5BCAD085-E8A6-8845-BD4E-CB4CCA059FC4}" type="datetimeFigureOut">
               <a:rPr lang="en-US" smtClean="0"/>
-              <a:t>3/3/2026</a:t>
+              <a:t>3/5/2026</a:t>
             </a:fld>
             <a:endParaRPr lang="en-US"/>
           </a:p>
@@ -1891,7 +1893,7 @@
           <a:p>
             <a:fld id="{5BCAD085-E8A6-8845-BD4E-CB4CCA059FC4}" type="datetimeFigureOut">
               <a:rPr lang="en-US" smtClean="0"/>
-              <a:t>3/3/2026</a:t>
+              <a:t>3/5/2026</a:t>
             </a:fld>
             <a:endParaRPr lang="en-US"/>
           </a:p>
@@ -1986,7 +1988,7 @@
           <a:p>
             <a:fld id="{5BCAD085-E8A6-8845-BD4E-CB4CCA059FC4}" type="datetimeFigureOut">
               <a:rPr lang="en-US" smtClean="0"/>
-              <a:t>3/3/2026</a:t>
+              <a:t>3/5/2026</a:t>
             </a:fld>
             <a:endParaRPr lang="en-US"/>
           </a:p>
@@ -2261,7 +2263,7 @@
           <a:p>
             <a:fld id="{5BCAD085-E8A6-8845-BD4E-CB4CCA059FC4}" type="datetimeFigureOut">
               <a:rPr lang="en-US" smtClean="0"/>
-              <a:t>3/3/2026</a:t>
+              <a:t>3/5/2026</a:t>
             </a:fld>
             <a:endParaRPr lang="en-US"/>
           </a:p>
@@ -2513,7 +2515,7 @@
           <a:p>
             <a:fld id="{5BCAD085-E8A6-8845-BD4E-CB4CCA059FC4}" type="datetimeFigureOut">
               <a:rPr lang="en-US" smtClean="0"/>
-              <a:t>3/3/2026</a:t>
+              <a:t>3/5/2026</a:t>
             </a:fld>
             <a:endParaRPr lang="en-US"/>
           </a:p>
@@ -2724,7 +2726,7 @@
           <a:p>
             <a:fld id="{5BCAD085-E8A6-8845-BD4E-CB4CCA059FC4}" type="datetimeFigureOut">
               <a:rPr lang="en-US" smtClean="0"/>
-              <a:t>3/3/2026</a:t>
+              <a:t>3/5/2026</a:t>
             </a:fld>
             <a:endParaRPr lang="en-US"/>
           </a:p>
@@ -3234,6 +3236,193 @@
     </p:bg>
     <p:spTree>
       <p:nvGrpSpPr>
+        <p:cNvPr id="1" name="">
+          <a:extLst>
+            <a:ext uri="{FF2B5EF4-FFF2-40B4-BE49-F238E27FC236}">
+              <a16:creationId xmlns:a16="http://schemas.microsoft.com/office/drawing/2014/main" id="{350B23C1-C443-D561-52B0-3732071FC5EC}"/>
+            </a:ext>
+          </a:extLst>
+        </p:cNvPr>
+        <p:cNvGrpSpPr/>
+        <p:nvPr/>
+      </p:nvGrpSpPr>
+      <p:grpSpPr>
+        <a:xfrm>
+          <a:off x="0" y="0"/>
+          <a:ext cx="0" cy="0"/>
+          <a:chOff x="0" y="0"/>
+          <a:chExt cx="0" cy="0"/>
+        </a:xfrm>
+      </p:grpSpPr>
+      <p:sp>
+        <p:nvSpPr>
+          <p:cNvPr id="2" name="Title 1">
+            <a:extLst>
+              <a:ext uri="{FF2B5EF4-FFF2-40B4-BE49-F238E27FC236}">
+                <a16:creationId xmlns:a16="http://schemas.microsoft.com/office/drawing/2014/main" id="{4D6590E1-F559-E792-3042-F6CA47F9D7A5}"/>
+              </a:ext>
+            </a:extLst>
+          </p:cNvPr>
+          <p:cNvSpPr>
+            <a:spLocks noGrp="1"/>
+          </p:cNvSpPr>
+          <p:nvPr>
+            <p:ph type="title"/>
+          </p:nvPr>
+        </p:nvSpPr>
+        <p:spPr/>
+        <p:txBody>
+          <a:bodyPr>
+            <a:normAutofit/>
+          </a:bodyPr>
+          <a:lstStyle/>
+          <a:p>
+            <a:r>
+              <a:rPr lang="en-US" dirty="0"/>
+              <a:t>Container Diagram</a:t>
+            </a:r>
+            <a:endParaRPr dirty="0"/>
+          </a:p>
+        </p:txBody>
+      </p:sp>
+      <p:sp>
+        <p:nvSpPr>
+          <p:cNvPr id="4" name="Rectangle 3">
+            <a:extLst>
+              <a:ext uri="{FF2B5EF4-FFF2-40B4-BE49-F238E27FC236}">
+                <a16:creationId xmlns:a16="http://schemas.microsoft.com/office/drawing/2014/main" id="{7EE0D5F2-8AFE-0DD6-C87B-55F978068E86}"/>
+              </a:ext>
+            </a:extLst>
+          </p:cNvPr>
+          <p:cNvSpPr/>
+          <p:nvPr/>
+        </p:nvSpPr>
+        <p:spPr>
+          <a:xfrm>
+            <a:off x="0" y="6812281"/>
+            <a:ext cx="9144000" cy="45719"/>
+          </a:xfrm>
+          <a:prstGeom prst="rect">
+            <a:avLst/>
+          </a:prstGeom>
+          <a:solidFill>
+            <a:srgbClr val="0070C0"/>
+          </a:solidFill>
+          <a:ln>
+            <a:noFill/>
+          </a:ln>
+        </p:spPr>
+        <p:style>
+          <a:lnRef idx="1">
+            <a:schemeClr val="accent1"/>
+          </a:lnRef>
+          <a:fillRef idx="3">
+            <a:schemeClr val="accent1"/>
+          </a:fillRef>
+          <a:effectRef idx="2">
+            <a:schemeClr val="accent1"/>
+          </a:effectRef>
+          <a:fontRef idx="minor">
+            <a:schemeClr val="lt1"/>
+          </a:fontRef>
+        </p:style>
+        <p:txBody>
+          <a:bodyPr rtlCol="0" anchor="ctr"/>
+          <a:lstStyle/>
+          <a:p>
+            <a:pPr marL="0" marR="0" lvl="0" indent="0" algn="ctr" defTabSz="457200" rtl="0" eaLnBrk="1" fontAlgn="auto" latinLnBrk="0" hangingPunct="1">
+              <a:lnSpc>
+                <a:spcPct val="100000"/>
+              </a:lnSpc>
+              <a:spcBef>
+                <a:spcPts val="0"/>
+              </a:spcBef>
+              <a:spcAft>
+                <a:spcPts val="0"/>
+              </a:spcAft>
+              <a:buClrTx/>
+              <a:buSzTx/>
+              <a:buFontTx/>
+              <a:buNone/>
+              <a:tabLst/>
+              <a:defRPr/>
+            </a:pPr>
+            <a:endParaRPr kumimoji="0" sz="1800" b="0" i="0" u="none" strike="noStrike" kern="1200" cap="none" spc="0" normalizeH="0" baseline="0" noProof="0">
+              <a:ln>
+                <a:noFill/>
+              </a:ln>
+              <a:solidFill>
+                <a:prstClr val="white"/>
+              </a:solidFill>
+              <a:effectLst/>
+              <a:uLnTx/>
+              <a:uFillTx/>
+              <a:latin typeface="Calibri"/>
+              <a:ea typeface="+mn-ea"/>
+              <a:cs typeface="+mn-cs"/>
+            </a:endParaRPr>
+          </a:p>
+        </p:txBody>
+      </p:sp>
+      <p:pic>
+        <p:nvPicPr>
+          <p:cNvPr id="5" name="Picture 4">
+            <a:extLst>
+              <a:ext uri="{FF2B5EF4-FFF2-40B4-BE49-F238E27FC236}">
+                <a16:creationId xmlns:a16="http://schemas.microsoft.com/office/drawing/2014/main" id="{269DAC9F-4901-3852-74CE-A5483B0B02AD}"/>
+              </a:ext>
+            </a:extLst>
+          </p:cNvPr>
+          <p:cNvPicPr>
+            <a:picLocks noChangeAspect="1"/>
+          </p:cNvPicPr>
+          <p:nvPr/>
+        </p:nvPicPr>
+        <p:blipFill>
+          <a:blip r:embed="rId2"/>
+          <a:stretch>
+            <a:fillRect/>
+          </a:stretch>
+        </p:blipFill>
+        <p:spPr>
+          <a:xfrm>
+            <a:off x="0" y="1417638"/>
+            <a:ext cx="9144000" cy="4253702"/>
+          </a:xfrm>
+          <a:prstGeom prst="rect">
+            <a:avLst/>
+          </a:prstGeom>
+        </p:spPr>
+      </p:pic>
+    </p:spTree>
+    <p:extLst>
+      <p:ext uri="{BB962C8B-B14F-4D97-AF65-F5344CB8AC3E}">
+        <p14:creationId xmlns:p14="http://schemas.microsoft.com/office/powerpoint/2010/main" val="3323502839"/>
+      </p:ext>
+    </p:extLst>
+  </p:cSld>
+  <p:clrMapOvr>
+    <a:masterClrMapping/>
+  </p:clrMapOvr>
+</p:sld>
+</file>
+
+<file path=ppt/slides/slide11.xml><?xml version="1.0" encoding="utf-8"?>
+<p:sld xmlns:a="http://schemas.openxmlformats.org/drawingml/2006/main" xmlns:r="http://schemas.openxmlformats.org/officeDocument/2006/relationships" xmlns:p="http://schemas.openxmlformats.org/presentationml/2006/main">
+  <p:cSld>
+    <p:bg>
+      <p:bgPr>
+        <a:solidFill>
+          <a:schemeClr val="accent1">
+            <a:lumMod val="20000"/>
+            <a:lumOff val="80000"/>
+          </a:schemeClr>
+        </a:solidFill>
+        <a:effectLst/>
+      </p:bgPr>
+    </p:bg>
+    <p:spTree>
+      <p:nvGrpSpPr>
         <p:cNvPr id="1" name=""/>
         <p:cNvGrpSpPr/>
         <p:nvPr/>
@@ -3259,6 +3448,200 @@
         <p:spPr/>
         <p:txBody>
           <a:bodyPr>
+            <a:normAutofit fontScale="90000"/>
+          </a:bodyPr>
+          <a:lstStyle/>
+          <a:p>
+            <a:r>
+              <a:t>Option A – RabbitMQ-Based Processing (Quick Improvement)</a:t>
+            </a:r>
+          </a:p>
+        </p:txBody>
+      </p:sp>
+      <p:sp>
+        <p:nvSpPr>
+          <p:cNvPr id="3" name="Content Placeholder 2"/>
+          <p:cNvSpPr>
+            <a:spLocks noGrp="1"/>
+          </p:cNvSpPr>
+          <p:nvPr>
+            <p:ph idx="1"/>
+          </p:nvPr>
+        </p:nvSpPr>
+        <p:spPr/>
+        <p:txBody>
+          <a:bodyPr>
+            <a:normAutofit fontScale="85000" lnSpcReduction="20000"/>
+          </a:bodyPr>
+          <a:lstStyle/>
+          <a:p>
+            <a:r>
+              <a:t>Approach:</a:t>
+            </a:r>
+          </a:p>
+          <a:p>
+            <a:pPr lvl="1"/>
+            <a:r>
+              <a:t>Use RabbitMQ to store E-Service transactions.</a:t>
+            </a:r>
+          </a:p>
+          <a:p>
+            <a:pPr lvl="1"/>
+            <a:r>
+              <a:t>Backend consumes messages asynchronously.</a:t>
+            </a:r>
+          </a:p>
+          <a:p>
+            <a:pPr lvl="1"/>
+            <a:r>
+              <a:t>Sale data saved after consumption.</a:t>
+            </a:r>
+          </a:p>
+          <a:p>
+            <a:pPr lvl="1"/>
+            <a:endParaRPr/>
+          </a:p>
+          <a:p>
+            <a:pPr lvl="1"/>
+            <a:r>
+              <a:t>Benefits:</a:t>
+            </a:r>
+          </a:p>
+          <a:p>
+            <a:pPr lvl="1"/>
+            <a:r>
+              <a:t>Fast POS response (non-blocking).</a:t>
+            </a:r>
+          </a:p>
+          <a:p>
+            <a:pPr lvl="1"/>
+            <a:r>
+              <a:t>Minimal architecture change.</a:t>
+            </a:r>
+          </a:p>
+          <a:p>
+            <a:pPr lvl="1"/>
+            <a:r>
+              <a:t>Short development time.</a:t>
+            </a:r>
+          </a:p>
+          <a:p>
+            <a:pPr lvl="1"/>
+            <a:endParaRPr/>
+          </a:p>
+          <a:p>
+            <a:pPr lvl="1"/>
+            <a:r>
+              <a:t>Limitation:</a:t>
+            </a:r>
+          </a:p>
+          <a:p>
+            <a:pPr lvl="1"/>
+            <a:r>
+              <a:t>Limited long-term scalability.</a:t>
+            </a:r>
+          </a:p>
+        </p:txBody>
+      </p:sp>
+      <p:sp>
+        <p:nvSpPr>
+          <p:cNvPr id="4" name="Rectangle 3">
+            <a:extLst>
+              <a:ext uri="{FF2B5EF4-FFF2-40B4-BE49-F238E27FC236}">
+                <a16:creationId xmlns:a16="http://schemas.microsoft.com/office/drawing/2014/main" id="{DFF9DE94-0412-2D18-AF0D-F6021B9DE03E}"/>
+              </a:ext>
+            </a:extLst>
+          </p:cNvPr>
+          <p:cNvSpPr/>
+          <p:nvPr/>
+        </p:nvSpPr>
+        <p:spPr>
+          <a:xfrm>
+            <a:off x="0" y="6812281"/>
+            <a:ext cx="9144000" cy="45719"/>
+          </a:xfrm>
+          <a:prstGeom prst="rect">
+            <a:avLst/>
+          </a:prstGeom>
+          <a:solidFill>
+            <a:srgbClr val="0070C0"/>
+          </a:solidFill>
+          <a:ln>
+            <a:noFill/>
+          </a:ln>
+        </p:spPr>
+        <p:style>
+          <a:lnRef idx="1">
+            <a:schemeClr val="accent1"/>
+          </a:lnRef>
+          <a:fillRef idx="3">
+            <a:schemeClr val="accent1"/>
+          </a:fillRef>
+          <a:effectRef idx="2">
+            <a:schemeClr val="accent1"/>
+          </a:effectRef>
+          <a:fontRef idx="minor">
+            <a:schemeClr val="lt1"/>
+          </a:fontRef>
+        </p:style>
+        <p:txBody>
+          <a:bodyPr rtlCol="0" anchor="ctr"/>
+          <a:lstStyle/>
+          <a:p>
+            <a:pPr algn="ctr"/>
+            <a:endParaRPr/>
+          </a:p>
+        </p:txBody>
+      </p:sp>
+    </p:spTree>
+  </p:cSld>
+  <p:clrMapOvr>
+    <a:masterClrMapping/>
+  </p:clrMapOvr>
+</p:sld>
+</file>
+
+<file path=ppt/slides/slide12.xml><?xml version="1.0" encoding="utf-8"?>
+<p:sld xmlns:a="http://schemas.openxmlformats.org/drawingml/2006/main" xmlns:r="http://schemas.openxmlformats.org/officeDocument/2006/relationships" xmlns:p="http://schemas.openxmlformats.org/presentationml/2006/main">
+  <p:cSld>
+    <p:bg>
+      <p:bgPr>
+        <a:solidFill>
+          <a:schemeClr val="accent1">
+            <a:lumMod val="20000"/>
+            <a:lumOff val="80000"/>
+          </a:schemeClr>
+        </a:solidFill>
+        <a:effectLst/>
+      </p:bgPr>
+    </p:bg>
+    <p:spTree>
+      <p:nvGrpSpPr>
+        <p:cNvPr id="1" name=""/>
+        <p:cNvGrpSpPr/>
+        <p:nvPr/>
+      </p:nvGrpSpPr>
+      <p:grpSpPr>
+        <a:xfrm>
+          <a:off x="0" y="0"/>
+          <a:ext cx="0" cy="0"/>
+          <a:chOff x="0" y="0"/>
+          <a:chExt cx="0" cy="0"/>
+        </a:xfrm>
+      </p:grpSpPr>
+      <p:sp>
+        <p:nvSpPr>
+          <p:cNvPr id="2" name="Title 1"/>
+          <p:cNvSpPr>
+            <a:spLocks noGrp="1"/>
+          </p:cNvSpPr>
+          <p:nvPr>
+            <p:ph type="title"/>
+          </p:nvPr>
+        </p:nvSpPr>
+        <p:spPr/>
+        <p:txBody>
+          <a:bodyPr>
             <a:normAutofit/>
           </a:bodyPr>
           <a:lstStyle/>
@@ -3297,12 +3680,16 @@
               <a:t>How end to end work(</a:t>
             </a:r>
             <a:r>
-              <a:rPr lang="en-US" dirty="0" err="1"/>
+              <a:rPr lang="en-US" strike="sngStrike" dirty="0" err="1"/>
               <a:t>g&amp;G</a:t>
             </a:r>
             <a:r>
+              <a:rPr lang="en-US" strike="sngStrike" dirty="0"/>
+              <a:t> backend  connection  </a:t>
+            </a:r>
+            <a:r>
               <a:rPr lang="en-US" dirty="0"/>
-              <a:t> backend  connection  ,sync flow detail)? Code study, flow research</a:t>
+              <a:t>,sync flow detail)? Code study, flow research</a:t>
             </a:r>
           </a:p>
           <a:p>
@@ -3311,7 +3698,7 @@
               <a:buAutoNum type="arabicPeriod"/>
             </a:pPr>
             <a:r>
-              <a:rPr lang="en-US" dirty="0"/>
+              <a:rPr lang="en-US" strike="sngStrike" dirty="0"/>
               <a:t>Sale database size –more than 7 million</a:t>
             </a:r>
           </a:p>
@@ -5354,7 +5741,13 @@
     </p:bg>
     <p:spTree>
       <p:nvGrpSpPr>
-        <p:cNvPr id="1" name=""/>
+        <p:cNvPr id="1" name="">
+          <a:extLst>
+            <a:ext uri="{FF2B5EF4-FFF2-40B4-BE49-F238E27FC236}">
+              <a16:creationId xmlns:a16="http://schemas.microsoft.com/office/drawing/2014/main" id="{2507DE58-8F00-EFBC-9EE5-BC92057D3E95}"/>
+            </a:ext>
+          </a:extLst>
+        </p:cNvPr>
         <p:cNvGrpSpPr/>
         <p:nvPr/>
       </p:nvGrpSpPr>
@@ -5368,7 +5761,13 @@
       </p:grpSpPr>
       <p:sp>
         <p:nvSpPr>
-          <p:cNvPr id="2" name="Title 1"/>
+          <p:cNvPr id="2" name="Title 1">
+            <a:extLst>
+              <a:ext uri="{FF2B5EF4-FFF2-40B4-BE49-F238E27FC236}">
+                <a16:creationId xmlns:a16="http://schemas.microsoft.com/office/drawing/2014/main" id="{D7F26186-C51E-5C57-EE30-23F8664D0581}"/>
+              </a:ext>
+            </a:extLst>
+          </p:cNvPr>
           <p:cNvSpPr>
             <a:spLocks noGrp="1"/>
           </p:cNvSpPr>
@@ -5379,98 +5778,15 @@
         <p:spPr/>
         <p:txBody>
           <a:bodyPr>
-            <a:normAutofit fontScale="90000"/>
+            <a:normAutofit/>
           </a:bodyPr>
           <a:lstStyle/>
           <a:p>
             <a:r>
-              <a:t>Option A – RabbitMQ-Based Processing (Quick Improvement)</a:t>
-            </a:r>
-          </a:p>
-        </p:txBody>
-      </p:sp>
-      <p:sp>
-        <p:nvSpPr>
-          <p:cNvPr id="3" name="Content Placeholder 2"/>
-          <p:cNvSpPr>
-            <a:spLocks noGrp="1"/>
-          </p:cNvSpPr>
-          <p:nvPr>
-            <p:ph idx="1"/>
-          </p:nvPr>
-        </p:nvSpPr>
-        <p:spPr/>
-        <p:txBody>
-          <a:bodyPr>
-            <a:normAutofit fontScale="85000" lnSpcReduction="20000"/>
-          </a:bodyPr>
-          <a:lstStyle/>
-          <a:p>
-            <a:r>
-              <a:t>Approach:</a:t>
-            </a:r>
-          </a:p>
-          <a:p>
-            <a:pPr lvl="1"/>
-            <a:r>
-              <a:t>Use RabbitMQ to store E-Service transactions.</a:t>
-            </a:r>
-          </a:p>
-          <a:p>
-            <a:pPr lvl="1"/>
-            <a:r>
-              <a:t>Backend consumes messages asynchronously.</a:t>
-            </a:r>
-          </a:p>
-          <a:p>
-            <a:pPr lvl="1"/>
-            <a:r>
-              <a:t>Sale data saved after consumption.</a:t>
-            </a:r>
-          </a:p>
-          <a:p>
-            <a:pPr lvl="1"/>
-            <a:endParaRPr/>
-          </a:p>
-          <a:p>
-            <a:pPr lvl="1"/>
-            <a:r>
-              <a:t>Benefits:</a:t>
-            </a:r>
-          </a:p>
-          <a:p>
-            <a:pPr lvl="1"/>
-            <a:r>
-              <a:t>Fast POS response (non-blocking).</a:t>
-            </a:r>
-          </a:p>
-          <a:p>
-            <a:pPr lvl="1"/>
-            <a:r>
-              <a:t>Minimal architecture change.</a:t>
-            </a:r>
-          </a:p>
-          <a:p>
-            <a:pPr lvl="1"/>
-            <a:r>
-              <a:t>Short development time.</a:t>
-            </a:r>
-          </a:p>
-          <a:p>
-            <a:pPr lvl="1"/>
-            <a:endParaRPr/>
-          </a:p>
-          <a:p>
-            <a:pPr lvl="1"/>
-            <a:r>
-              <a:t>Limitation:</a:t>
-            </a:r>
-          </a:p>
-          <a:p>
-            <a:pPr lvl="1"/>
-            <a:r>
-              <a:t>Limited long-term scalability.</a:t>
-            </a:r>
+              <a:rPr lang="en-US" dirty="0"/>
+              <a:t>System Context</a:t>
+            </a:r>
+            <a:endParaRPr dirty="0"/>
           </a:p>
         </p:txBody>
       </p:sp>
@@ -5479,7 +5795,7 @@
           <p:cNvPr id="4" name="Rectangle 3">
             <a:extLst>
               <a:ext uri="{FF2B5EF4-FFF2-40B4-BE49-F238E27FC236}">
-                <a16:creationId xmlns:a16="http://schemas.microsoft.com/office/drawing/2014/main" id="{DFF9DE94-0412-2D18-AF0D-F6021B9DE03E}"/>
+                <a16:creationId xmlns:a16="http://schemas.microsoft.com/office/drawing/2014/main" id="{4762B330-FF51-999B-302D-B30F6A4C6C2A}"/>
               </a:ext>
             </a:extLst>
           </p:cNvPr>
@@ -5524,7 +5840,42 @@
           </a:p>
         </p:txBody>
       </p:sp>
+      <p:pic>
+        <p:nvPicPr>
+          <p:cNvPr id="10" name="Picture 9">
+            <a:extLst>
+              <a:ext uri="{FF2B5EF4-FFF2-40B4-BE49-F238E27FC236}">
+                <a16:creationId xmlns:a16="http://schemas.microsoft.com/office/drawing/2014/main" id="{B3431D3F-0F81-1255-A832-CB01C2C8F665}"/>
+              </a:ext>
+            </a:extLst>
+          </p:cNvPr>
+          <p:cNvPicPr>
+            <a:picLocks noChangeAspect="1"/>
+          </p:cNvPicPr>
+          <p:nvPr/>
+        </p:nvPicPr>
+        <p:blipFill>
+          <a:blip r:embed="rId2"/>
+          <a:stretch>
+            <a:fillRect/>
+          </a:stretch>
+        </p:blipFill>
+        <p:spPr>
+          <a:xfrm>
+            <a:off x="0" y="1276865"/>
+            <a:ext cx="9144000" cy="3070565"/>
+          </a:xfrm>
+          <a:prstGeom prst="rect">
+            <a:avLst/>
+          </a:prstGeom>
+        </p:spPr>
+      </p:pic>
     </p:spTree>
+    <p:extLst>
+      <p:ext uri="{BB962C8B-B14F-4D97-AF65-F5344CB8AC3E}">
+        <p14:creationId xmlns:p14="http://schemas.microsoft.com/office/powerpoint/2010/main" val="1157292009"/>
+      </p:ext>
+    </p:extLst>
   </p:cSld>
   <p:clrMapOvr>
     <a:masterClrMapping/>
